--- a/classes/parte-2-deep-learning/109-activaciones-relu-elu-gelu-swish-mish/clase-109-activaciones-relu-elu-gelu-swish-mish-presentacion.pptx
+++ b/classes/parte-2-deep-learning/109-activaciones-relu-elu-gelu-swish-mish/clase-109-activaciones-relu-elu-gelu-swish-mish-presentacion.pptx
@@ -4823,7 +4823,7 @@
                 </a:solidFill>
                 <a:latin typeface="Segoe UI"/>
               </a:rPr>
-              <a:t>Primer bloque ejecutable del notebook.</a:t>
+              <a:t>Keras 3 expone todas: relu, elu, gelu, silu (= swish), mish, más LeakyReLU como capa.</a:t>
             </a:r>
           </a:p>
         </p:txBody>
@@ -4910,7 +4910,254 @@
                 </a:solidFill>
                 <a:latin typeface="Courier New"/>
               </a:rPr>
-              <a:t># Imports y configuración inicial</a:t>
+              <a:t>import numpy as np</a:t>
+            </a:r>
+          </a:p>
+          <a:p>
+            <a:pPr>
+              <a:defRPr sz="1200" b="0">
+                <a:solidFill>
+                  <a:srgbClr val="F8FAFC"/>
+                </a:solidFill>
+                <a:latin typeface="Courier New"/>
+              </a:defRPr>
+            </a:pPr>
+            <a:r>
+              <a:rPr sz="1200" b="0">
+                <a:solidFill>
+                  <a:srgbClr val="F8FAFC"/>
+                </a:solidFill>
+                <a:latin typeface="Courier New"/>
+              </a:rPr>
+              <a:t>import tensorflow as tf</a:t>
+            </a:r>
+          </a:p>
+          <a:p>
+            <a:pPr>
+              <a:defRPr sz="1200" b="0">
+                <a:solidFill>
+                  <a:srgbClr val="F8FAFC"/>
+                </a:solidFill>
+                <a:latin typeface="Courier New"/>
+              </a:defRPr>
+            </a:pPr>
+            <a:r>
+              <a:rPr sz="1200" b="0">
+                <a:solidFill>
+                  <a:srgbClr val="F8FAFC"/>
+                </a:solidFill>
+                <a:latin typeface="Courier New"/>
+              </a:rPr>
+              <a:t>from tensorflow import keras</a:t>
+            </a:r>
+          </a:p>
+          <a:p>
+            <a:pPr>
+              <a:defRPr sz="1200" b="0">
+                <a:solidFill>
+                  <a:srgbClr val="F8FAFC"/>
+                </a:solidFill>
+                <a:latin typeface="Courier New"/>
+              </a:defRPr>
+            </a:pPr>
+            <a:r>
+              <a:rPr sz="1200" b="0">
+                <a:solidFill>
+                  <a:srgbClr val="F8FAFC"/>
+                </a:solidFill>
+                <a:latin typeface="Courier New"/>
+              </a:rPr>
+              <a:t>from tensorflow.keras import layers</a:t>
+            </a:r>
+          </a:p>
+          <a:p>
+            <a:pPr>
+              <a:defRPr sz="1200" b="0">
+                <a:solidFill>
+                  <a:srgbClr val="F8FAFC"/>
+                </a:solidFill>
+                <a:latin typeface="Courier New"/>
+              </a:defRPr>
+            </a:pPr>
+            <a:r>
+              <a:rPr sz="1200" b="0">
+                <a:solidFill>
+                  <a:srgbClr val="F8FAFC"/>
+                </a:solidFill>
+                <a:latin typeface="Courier New"/>
+              </a:rPr>
+              <a:t>keras.utils.set_random_seed(42)</a:t>
+            </a:r>
+          </a:p>
+          <a:p>
+            <a:pPr>
+              <a:defRPr sz="1200" b="0">
+                <a:solidFill>
+                  <a:srgbClr val="F8FAFC"/>
+                </a:solidFill>
+                <a:latin typeface="Courier New"/>
+              </a:defRPr>
+            </a:pPr>
+            <a:r>
+              <a:rPr sz="1200" b="0">
+                <a:solidFill>
+                  <a:srgbClr val="F8FAFC"/>
+                </a:solidFill>
+                <a:latin typeface="Courier New"/>
+              </a:rPr>
+              <a:t> </a:t>
+            </a:r>
+          </a:p>
+          <a:p>
+            <a:pPr>
+              <a:defRPr sz="1200" b="0">
+                <a:solidFill>
+                  <a:srgbClr val="F8FAFC"/>
+                </a:solidFill>
+                <a:latin typeface="Courier New"/>
+              </a:defRPr>
+            </a:pPr>
+            <a:r>
+              <a:rPr sz="1200" b="0">
+                <a:solidFill>
+                  <a:srgbClr val="F8FAFC"/>
+                </a:solidFill>
+                <a:latin typeface="Courier New"/>
+              </a:rPr>
+              <a:t>x = tf.linspace(-3.0, 3.0, 7)</a:t>
+            </a:r>
+          </a:p>
+          <a:p>
+            <a:pPr>
+              <a:defRPr sz="1200" b="0">
+                <a:solidFill>
+                  <a:srgbClr val="F8FAFC"/>
+                </a:solidFill>
+                <a:latin typeface="Courier New"/>
+              </a:defRPr>
+            </a:pPr>
+            <a:r>
+              <a:rPr sz="1200" b="0">
+                <a:solidFill>
+                  <a:srgbClr val="F8FAFC"/>
+                </a:solidFill>
+                <a:latin typeface="Courier New"/>
+              </a:rPr>
+              <a:t>print("ReLU :", keras.activations.relu(x).numpy().round(3))</a:t>
+            </a:r>
+          </a:p>
+          <a:p>
+            <a:pPr>
+              <a:defRPr sz="1200" b="0">
+                <a:solidFill>
+                  <a:srgbClr val="F8FAFC"/>
+                </a:solidFill>
+                <a:latin typeface="Courier New"/>
+              </a:defRPr>
+            </a:pPr>
+            <a:r>
+              <a:rPr sz="1200" b="0">
+                <a:solidFill>
+                  <a:srgbClr val="F8FAFC"/>
+                </a:solidFill>
+                <a:latin typeface="Courier New"/>
+              </a:rPr>
+              <a:t>print("ELU  :", keras.activations.elu(x).numpy().round(3))</a:t>
+            </a:r>
+          </a:p>
+          <a:p>
+            <a:pPr>
+              <a:defRPr sz="1200" b="0">
+                <a:solidFill>
+                  <a:srgbClr val="F8FAFC"/>
+                </a:solidFill>
+                <a:latin typeface="Courier New"/>
+              </a:defRPr>
+            </a:pPr>
+            <a:r>
+              <a:rPr sz="1200" b="0">
+                <a:solidFill>
+                  <a:srgbClr val="F8FAFC"/>
+                </a:solidFill>
+                <a:latin typeface="Courier New"/>
+              </a:rPr>
+              <a:t>print("GELU :", keras.activations.gelu(x).numpy().round(3))</a:t>
+            </a:r>
+          </a:p>
+          <a:p>
+            <a:pPr>
+              <a:defRPr sz="1200" b="0">
+                <a:solidFill>
+                  <a:srgbClr val="F8FAFC"/>
+                </a:solidFill>
+                <a:latin typeface="Courier New"/>
+              </a:defRPr>
+            </a:pPr>
+            <a:r>
+              <a:rPr sz="1200" b="0">
+                <a:solidFill>
+                  <a:srgbClr val="F8FAFC"/>
+                </a:solidFill>
+                <a:latin typeface="Courier New"/>
+              </a:rPr>
+              <a:t>print("SiLU :", keras.activations.silu(x).numpy().round(3))   # = Swish</a:t>
+            </a:r>
+          </a:p>
+          <a:p>
+            <a:pPr>
+              <a:defRPr sz="1200" b="0">
+                <a:solidFill>
+                  <a:srgbClr val="F8FAFC"/>
+                </a:solidFill>
+                <a:latin typeface="Courier New"/>
+              </a:defRPr>
+            </a:pPr>
+            <a:r>
+              <a:rPr sz="1200" b="0">
+                <a:solidFill>
+                  <a:srgbClr val="F8FAFC"/>
+                </a:solidFill>
+                <a:latin typeface="Courier New"/>
+              </a:rPr>
+              <a:t>print("Mish :", keras.activations.mish(x).numpy().round(3))</a:t>
+            </a:r>
+          </a:p>
+          <a:p>
+            <a:pPr>
+              <a:defRPr sz="1200" b="0">
+                <a:solidFill>
+                  <a:srgbClr val="F8FAFC"/>
+                </a:solidFill>
+                <a:latin typeface="Courier New"/>
+              </a:defRPr>
+            </a:pPr>
+            <a:r>
+              <a:rPr sz="1200" b="0">
+                <a:solidFill>
+                  <a:srgbClr val="F8FAFC"/>
+                </a:solidFill>
+                <a:latin typeface="Courier New"/>
+              </a:rPr>
+              <a:t>leaky = layers.LeakyReLU(negative_slope=0.1)                  # Keras 3: negative_slope</a:t>
+            </a:r>
+          </a:p>
+          <a:p>
+            <a:pPr>
+              <a:defRPr sz="1200" b="0">
+                <a:solidFill>
+                  <a:srgbClr val="F8FAFC"/>
+                </a:solidFill>
+                <a:latin typeface="Courier New"/>
+              </a:defRPr>
+            </a:pPr>
+            <a:r>
+              <a:rPr sz="1200" b="0">
+                <a:solidFill>
+                  <a:srgbClr val="F8FAFC"/>
+                </a:solidFill>
+                <a:latin typeface="Courier New"/>
+              </a:rPr>
+              <a:t>print("Leaky:", leaky(x).numpy().round(3))</a:t>
             </a:r>
           </a:p>
         </p:txBody>

--- a/classes/parte-2-deep-learning/109-activaciones-relu-elu-gelu-swish-mish/clase-109-activaciones-relu-elu-gelu-swish-mish-presentacion.pptx
+++ b/classes/parte-2-deep-learning/109-activaciones-relu-elu-gelu-swish-mish/clase-109-activaciones-relu-elu-gelu-swish-mish-presentacion.pptx
@@ -3272,7 +3272,7 @@
                 </a:solidFill>
                 <a:latin typeface="Segoe UI"/>
               </a:rPr>
-              <a:t>Parte: 2 — Deep Learning · Fuente: Géron, cap. 11 § Better Activation Functions.  Duración estimada: 60 min.</a:t>
+              <a:t>Parte: 2 — Deep Learning · Fuente: Géron, cap. 11 § Better Activation Functions.  Duración estimada: 60 min. · Nivel: Avanzado</a:t>
             </a:r>
           </a:p>
         </p:txBody>
@@ -3581,7 +3581,7 @@
                 </a:solidFill>
                 <a:latin typeface="Segoe UI"/>
               </a:rPr>
-              <a:t>Parte: 2 — Deep Learning · Fuente: Géron, cap. 11 § Better Activation Functions.  Duración estimada: 60 min.</a:t>
+              <a:t>Parte: 2 — Deep Learning · Fuente: Géron, cap. 11 § Better Activation Functions.  Duración estimada: 60 min. · Nivel: Avanzado</a:t>
             </a:r>
           </a:p>
         </p:txBody>
